--- a/techsessions/triage_tech_session_2025.pptx
+++ b/techsessions/triage_tech_session_2025.pptx
@@ -279,7 +279,7 @@
       <p15:sldGuideLst xmlns:p15="http://schemas.microsoft.com/office/powerpoint/2012/main"/>
     </p:ext>
     <p:ext uri="http://customooxmlschemas.google.com/">
-      <go:slidesCustomData xmlns:go="http://customooxmlschemas.google.com/" xmlns:p15="http://schemas.microsoft.com/office/powerpoint/2012/main" xmlns:p14="http://schemas.microsoft.com/office/powerpoint/2010/main" xmlns:com="http://schemas.openxmlformats.org/drawingml/2006/compatibility" xmlns:pvml="urn:schemas-microsoft-com:office:powerpoint" xmlns:v="urn:schemas-microsoft-com:vml" xmlns:o="urn:schemas-microsoft-com:office:office" xmlns:dgm="http://schemas.openxmlformats.org/drawingml/2006/diagram" xmlns:c="http://schemas.openxmlformats.org/drawingml/2006/chart" xmlns:mv="urn:schemas-microsoft-com:mac:vml" xmlns:mc="http://schemas.openxmlformats.org/markup-compatibility/2006" xmlns="" r:id="rId54" roundtripDataSignature="AMtx7mjFyVUGRZWio+dc9dxzYsimUxNJbg=="/>
+      <go:slidesCustomData xmlns="" xmlns:mc="http://schemas.openxmlformats.org/markup-compatibility/2006" xmlns:mv="urn:schemas-microsoft-com:mac:vml" xmlns:c="http://schemas.openxmlformats.org/drawingml/2006/chart" xmlns:dgm="http://schemas.openxmlformats.org/drawingml/2006/diagram" xmlns:o="urn:schemas-microsoft-com:office:office" xmlns:v="urn:schemas-microsoft-com:vml" xmlns:pvml="urn:schemas-microsoft-com:office:powerpoint" xmlns:com="http://schemas.openxmlformats.org/drawingml/2006/compatibility" xmlns:p14="http://schemas.microsoft.com/office/powerpoint/2010/main" xmlns:p15="http://schemas.microsoft.com/office/powerpoint/2012/main" xmlns:go="http://customooxmlschemas.google.com/" r:id="rId54" roundtripDataSignature="AMtx7mjFyVUGRZWio+dc9dxzYsimUxNJbg=="/>
     </p:ext>
   </p:extLst>
 </p:presentation>
@@ -14286,7 +14286,7 @@
             </a:r>
             <a:r>
               <a:rPr lang="en-US" dirty="0"/>
-              <a:t> set up…</a:t>
+              <a:t> notebook set up…</a:t>
             </a:r>
           </a:p>
         </p:txBody>
@@ -14312,9 +14312,12 @@
           <a:bodyPr/>
           <a:lstStyle/>
           <a:p>
+            <a:pPr marL="76200" indent="0">
+              <a:buNone/>
+            </a:pPr>
             <a:r>
               <a:rPr lang="en-US" dirty="0" err="1"/>
-              <a:t>Github.com</a:t>
+              <a:t>github.com</a:t>
             </a:r>
             <a:r>
               <a:rPr lang="en-US" dirty="0"/>
@@ -20189,7 +20192,19 @@
             </a:r>
             <a:r>
               <a:rPr lang="en-US" dirty="0"/>
-              <a:t>field that is of type integer and uniquely identifies each individual</a:t>
+              <a:t>field that is of </a:t>
+            </a:r>
+            <a:r>
+              <a:rPr lang="en-US" b="1" dirty="0">
+                <a:solidFill>
+                  <a:srgbClr val="FF0000"/>
+                </a:solidFill>
+              </a:rPr>
+              <a:t>type integer </a:t>
+            </a:r>
+            <a:r>
+              <a:rPr lang="en-US" dirty="0"/>
+              <a:t>and uniquely identifies each individual</a:t>
             </a:r>
           </a:p>
           <a:p>
